--- a/test/c_e_dn.pptx
+++ b/test/c_e_dn.pptx
@@ -3097,7 +3097,7 @@
         <p:spPr>
           <a:xfrm>
             <a:off x="0" y="0"/>
-            <a:ext cx="6858000" cy="6040049"/>
+            <a:ext cx="6858000" cy="2768356"/>
           </a:xfrm>
           <a:custGeom>
             <a:avLst/>
@@ -3106,387 +3106,1062 @@
             <a:cxnLst/>
             <a:rect l="l" t="t" r="r" b="b"/>
             <a:pathLst>
-              <a:path w="6858000" h="6040049">
+              <a:path w="6858000" h="2768356">
                 <a:moveTo>
-                  <a:pt x="0" y="1883872"/>
+                  <a:pt x="0" y="863441"/>
                 </a:moveTo>
                 <a:lnTo>
-                  <a:pt x="5231" y="2178601"/>
-                </a:lnTo>
-                <a:lnTo>
-                  <a:pt x="20899" y="2471846"/>
-                </a:lnTo>
-                <a:lnTo>
-                  <a:pt x="46924" y="2762131"/>
-                </a:lnTo>
-                <a:lnTo>
-                  <a:pt x="83176" y="3047994"/>
-                </a:lnTo>
-                <a:lnTo>
-                  <a:pt x="129473" y="3327996"/>
-                </a:lnTo>
-                <a:lnTo>
-                  <a:pt x="185580" y="3600728"/>
-                </a:lnTo>
-                <a:lnTo>
-                  <a:pt x="251215" y="3864816"/>
-                </a:lnTo>
-                <a:lnTo>
-                  <a:pt x="326049" y="4118930"/>
-                </a:lnTo>
-                <a:lnTo>
-                  <a:pt x="409704" y="4361792"/>
-                </a:lnTo>
-                <a:lnTo>
-                  <a:pt x="501759" y="4592179"/>
-                </a:lnTo>
-                <a:lnTo>
-                  <a:pt x="601751" y="4808931"/>
-                </a:lnTo>
-                <a:lnTo>
-                  <a:pt x="709176" y="5010956"/>
-                </a:lnTo>
-                <a:lnTo>
-                  <a:pt x="823493" y="5197237"/>
-                </a:lnTo>
-                <a:lnTo>
-                  <a:pt x="944127" y="5366837"/>
-                </a:lnTo>
-                <a:lnTo>
-                  <a:pt x="1070471" y="5518901"/>
-                </a:lnTo>
-                <a:lnTo>
-                  <a:pt x="1201888" y="5652665"/>
-                </a:lnTo>
-                <a:lnTo>
-                  <a:pt x="1337717" y="5767454"/>
-                </a:lnTo>
-                <a:lnTo>
-                  <a:pt x="1477274" y="5862691"/>
-                </a:lnTo>
-                <a:lnTo>
-                  <a:pt x="1619857" y="5937896"/>
-                </a:lnTo>
-                <a:lnTo>
-                  <a:pt x="1764746" y="5992691"/>
-                </a:lnTo>
-                <a:lnTo>
-                  <a:pt x="1911214" y="6026799"/>
-                </a:lnTo>
-                <a:lnTo>
-                  <a:pt x="2058522" y="6040049"/>
-                </a:lnTo>
-                <a:lnTo>
-                  <a:pt x="2205930" y="6032375"/>
-                </a:lnTo>
-                <a:lnTo>
-                  <a:pt x="2352694" y="6003815"/>
-                </a:lnTo>
-                <a:lnTo>
-                  <a:pt x="2498076" y="5954512"/>
-                </a:lnTo>
-                <a:lnTo>
-                  <a:pt x="2641344" y="5884715"/>
-                </a:lnTo>
-                <a:lnTo>
-                  <a:pt x="2781777" y="5794776"/>
-                </a:lnTo>
-                <a:lnTo>
-                  <a:pt x="2918668" y="5685147"/>
-                </a:lnTo>
-                <a:lnTo>
-                  <a:pt x="3051327" y="5556379"/>
-                </a:lnTo>
-                <a:lnTo>
-                  <a:pt x="3179086" y="5409123"/>
-                </a:lnTo>
-                <a:lnTo>
-                  <a:pt x="3301303" y="5244117"/>
-                </a:lnTo>
-                <a:lnTo>
-                  <a:pt x="3417362" y="5062195"/>
-                </a:lnTo>
-                <a:lnTo>
-                  <a:pt x="3526679" y="4864271"/>
-                </a:lnTo>
-                <a:lnTo>
-                  <a:pt x="3628703" y="4651341"/>
-                </a:lnTo>
-                <a:lnTo>
-                  <a:pt x="3722921" y="4424479"/>
-                </a:lnTo>
-                <a:lnTo>
-                  <a:pt x="3808858" y="4184826"/>
-                </a:lnTo>
-                <a:lnTo>
-                  <a:pt x="3886082" y="3933588"/>
-                </a:lnTo>
-                <a:lnTo>
-                  <a:pt x="3954204" y="3672031"/>
-                </a:lnTo>
-                <a:lnTo>
-                  <a:pt x="4012881" y="3401471"/>
-                </a:lnTo>
-                <a:lnTo>
-                  <a:pt x="4061818" y="3123270"/>
-                </a:lnTo>
-                <a:lnTo>
-                  <a:pt x="4100767" y="2838830"/>
-                </a:lnTo>
-                <a:lnTo>
-                  <a:pt x="4129534" y="2549582"/>
-                </a:lnTo>
-                <a:lnTo>
-                  <a:pt x="4147973" y="2256982"/>
-                </a:lnTo>
-                <a:lnTo>
-                  <a:pt x="4155991" y="1962504"/>
-                </a:lnTo>
-                <a:lnTo>
-                  <a:pt x="4153549" y="1667630"/>
-                </a:lnTo>
-                <a:lnTo>
-                  <a:pt x="4140657" y="1373844"/>
-                </a:lnTo>
-                <a:lnTo>
-                  <a:pt x="4117382" y="1082626"/>
-                </a:lnTo>
-                <a:lnTo>
-                  <a:pt x="4083841" y="795443"/>
-                </a:lnTo>
-                <a:lnTo>
-                  <a:pt x="4040202" y="513739"/>
-                </a:lnTo>
-                <a:lnTo>
-                  <a:pt x="4040202" y="513739"/>
-                </a:lnTo>
-                <a:lnTo>
-                  <a:pt x="4023656" y="443421"/>
-                </a:lnTo>
-                <a:lnTo>
-                  <a:pt x="3999049" y="375502"/>
-                </a:lnTo>
-                <a:lnTo>
-                  <a:pt x="3966715" y="310904"/>
-                </a:lnTo>
-                <a:lnTo>
-                  <a:pt x="3927091" y="250502"/>
-                </a:lnTo>
-                <a:lnTo>
-                  <a:pt x="3880716" y="195115"/>
-                </a:lnTo>
-                <a:lnTo>
-                  <a:pt x="3828216" y="145493"/>
-                </a:lnTo>
-                <a:lnTo>
-                  <a:pt x="3770305" y="102311"/>
-                </a:lnTo>
-                <a:lnTo>
-                  <a:pt x="3707768" y="66152"/>
-                </a:lnTo>
-                <a:lnTo>
-                  <a:pt x="3641451" y="37507"/>
-                </a:lnTo>
-                <a:lnTo>
-                  <a:pt x="3572254" y="16764"/>
-                </a:lnTo>
-                <a:lnTo>
-                  <a:pt x="3501116" y="4205"/>
-                </a:lnTo>
-                <a:lnTo>
-                  <a:pt x="3429000" y="0"/>
-                </a:lnTo>
-                <a:lnTo>
-                  <a:pt x="3356883" y="4205"/>
-                </a:lnTo>
-                <a:lnTo>
-                  <a:pt x="3285745" y="16764"/>
-                </a:lnTo>
-                <a:lnTo>
-                  <a:pt x="3216548" y="37507"/>
-                </a:lnTo>
-                <a:lnTo>
-                  <a:pt x="3150231" y="66152"/>
-                </a:lnTo>
-                <a:lnTo>
-                  <a:pt x="3087694" y="102311"/>
-                </a:lnTo>
-                <a:lnTo>
-                  <a:pt x="3029783" y="145493"/>
-                </a:lnTo>
-                <a:lnTo>
-                  <a:pt x="2977283" y="195115"/>
-                </a:lnTo>
-                <a:lnTo>
-                  <a:pt x="2930908" y="250502"/>
-                </a:lnTo>
-                <a:lnTo>
-                  <a:pt x="2891284" y="310904"/>
-                </a:lnTo>
-                <a:lnTo>
-                  <a:pt x="2858950" y="375502"/>
-                </a:lnTo>
-                <a:lnTo>
-                  <a:pt x="2834343" y="443421"/>
-                </a:lnTo>
-                <a:lnTo>
-                  <a:pt x="2817797" y="513739"/>
-                </a:lnTo>
-                <a:lnTo>
-                  <a:pt x="2817797" y="513739"/>
-                </a:lnTo>
-                <a:lnTo>
-                  <a:pt x="2774158" y="795443"/>
-                </a:lnTo>
-                <a:lnTo>
-                  <a:pt x="2740617" y="1082626"/>
-                </a:lnTo>
-                <a:lnTo>
-                  <a:pt x="2717342" y="1373844"/>
-                </a:lnTo>
-                <a:lnTo>
-                  <a:pt x="2704450" y="1667630"/>
-                </a:lnTo>
-                <a:lnTo>
-                  <a:pt x="2702008" y="1962504"/>
-                </a:lnTo>
-                <a:lnTo>
-                  <a:pt x="2710026" y="2256982"/>
-                </a:lnTo>
-                <a:lnTo>
-                  <a:pt x="2728465" y="2549582"/>
-                </a:lnTo>
-                <a:lnTo>
-                  <a:pt x="2757232" y="2838830"/>
-                </a:lnTo>
-                <a:lnTo>
-                  <a:pt x="2796181" y="3123270"/>
-                </a:lnTo>
-                <a:lnTo>
-                  <a:pt x="2845118" y="3401471"/>
-                </a:lnTo>
-                <a:lnTo>
-                  <a:pt x="2903795" y="3672031"/>
-                </a:lnTo>
-                <a:lnTo>
-                  <a:pt x="2971917" y="3933588"/>
-                </a:lnTo>
-                <a:lnTo>
-                  <a:pt x="3049141" y="4184826"/>
-                </a:lnTo>
-                <a:lnTo>
-                  <a:pt x="3135078" y="4424479"/>
-                </a:lnTo>
-                <a:lnTo>
-                  <a:pt x="3229296" y="4651341"/>
-                </a:lnTo>
-                <a:lnTo>
-                  <a:pt x="3331320" y="4864271"/>
-                </a:lnTo>
-                <a:lnTo>
-                  <a:pt x="3440637" y="5062195"/>
-                </a:lnTo>
-                <a:lnTo>
-                  <a:pt x="3556696" y="5244117"/>
-                </a:lnTo>
-                <a:lnTo>
-                  <a:pt x="3678913" y="5409123"/>
-                </a:lnTo>
-                <a:lnTo>
-                  <a:pt x="3806672" y="5556379"/>
-                </a:lnTo>
-                <a:lnTo>
-                  <a:pt x="3939331" y="5685147"/>
-                </a:lnTo>
-                <a:lnTo>
-                  <a:pt x="4076222" y="5794776"/>
-                </a:lnTo>
-                <a:lnTo>
-                  <a:pt x="4216655" y="5884715"/>
-                </a:lnTo>
-                <a:lnTo>
-                  <a:pt x="4359923" y="5954512"/>
-                </a:lnTo>
-                <a:lnTo>
-                  <a:pt x="4505305" y="6003815"/>
-                </a:lnTo>
-                <a:lnTo>
-                  <a:pt x="4652069" y="6032375"/>
-                </a:lnTo>
-                <a:lnTo>
-                  <a:pt x="4799477" y="6040049"/>
-                </a:lnTo>
-                <a:lnTo>
-                  <a:pt x="4946785" y="6026799"/>
-                </a:lnTo>
-                <a:lnTo>
-                  <a:pt x="5093253" y="5992691"/>
-                </a:lnTo>
-                <a:lnTo>
-                  <a:pt x="5238142" y="5937896"/>
-                </a:lnTo>
-                <a:lnTo>
-                  <a:pt x="5380725" y="5862691"/>
-                </a:lnTo>
-                <a:lnTo>
-                  <a:pt x="5520282" y="5767454"/>
-                </a:lnTo>
-                <a:lnTo>
-                  <a:pt x="5656111" y="5652665"/>
-                </a:lnTo>
-                <a:lnTo>
-                  <a:pt x="5787528" y="5518901"/>
-                </a:lnTo>
-                <a:lnTo>
-                  <a:pt x="5913872" y="5366837"/>
-                </a:lnTo>
-                <a:lnTo>
-                  <a:pt x="6034506" y="5197237"/>
-                </a:lnTo>
-                <a:lnTo>
-                  <a:pt x="6148823" y="5010956"/>
-                </a:lnTo>
-                <a:lnTo>
-                  <a:pt x="6256248" y="4808931"/>
-                </a:lnTo>
-                <a:lnTo>
-                  <a:pt x="6356240" y="4592179"/>
-                </a:lnTo>
-                <a:lnTo>
-                  <a:pt x="6448295" y="4361792"/>
-                </a:lnTo>
-                <a:lnTo>
-                  <a:pt x="6531950" y="4118930"/>
-                </a:lnTo>
-                <a:lnTo>
-                  <a:pt x="6606784" y="3864816"/>
-                </a:lnTo>
-                <a:lnTo>
-                  <a:pt x="6672419" y="3600728"/>
-                </a:lnTo>
-                <a:lnTo>
-                  <a:pt x="6728526" y="3327996"/>
-                </a:lnTo>
-                <a:lnTo>
-                  <a:pt x="6774823" y="3047994"/>
-                </a:lnTo>
-                <a:lnTo>
-                  <a:pt x="6811075" y="2762131"/>
-                </a:lnTo>
-                <a:lnTo>
-                  <a:pt x="6837100" y="2471846"/>
-                </a:lnTo>
-                <a:lnTo>
-                  <a:pt x="6852768" y="2178601"/>
-                </a:lnTo>
-                <a:lnTo>
-                  <a:pt x="6858000" y="1883872"/>
+                  <a:pt x="2397" y="998525"/>
+                </a:lnTo>
+                <a:lnTo>
+                  <a:pt x="9578" y="1132929"/>
+                </a:lnTo>
+                <a:lnTo>
+                  <a:pt x="21507" y="1265976"/>
+                </a:lnTo>
+                <a:lnTo>
+                  <a:pt x="38122" y="1396997"/>
+                </a:lnTo>
+                <a:lnTo>
+                  <a:pt x="59341" y="1525331"/>
+                </a:lnTo>
+                <a:lnTo>
+                  <a:pt x="85057" y="1650333"/>
+                </a:lnTo>
+                <a:lnTo>
+                  <a:pt x="115140" y="1771374"/>
+                </a:lnTo>
+                <a:lnTo>
+                  <a:pt x="149439" y="1887843"/>
+                </a:lnTo>
+                <a:lnTo>
+                  <a:pt x="187781" y="1999155"/>
+                </a:lnTo>
+                <a:lnTo>
+                  <a:pt x="229973" y="2104749"/>
+                </a:lnTo>
+                <a:lnTo>
+                  <a:pt x="275802" y="2204093"/>
+                </a:lnTo>
+                <a:lnTo>
+                  <a:pt x="325039" y="2296688"/>
+                </a:lnTo>
+                <a:lnTo>
+                  <a:pt x="377434" y="2382067"/>
+                </a:lnTo>
+                <a:lnTo>
+                  <a:pt x="432725" y="2459800"/>
+                </a:lnTo>
+                <a:lnTo>
+                  <a:pt x="490632" y="2529496"/>
+                </a:lnTo>
+                <a:lnTo>
+                  <a:pt x="550865" y="2590804"/>
+                </a:lnTo>
+                <a:lnTo>
+                  <a:pt x="613120" y="2643416"/>
+                </a:lnTo>
+                <a:lnTo>
+                  <a:pt x="677084" y="2687066"/>
+                </a:lnTo>
+                <a:lnTo>
+                  <a:pt x="742434" y="2721535"/>
+                </a:lnTo>
+                <a:lnTo>
+                  <a:pt x="808842" y="2746650"/>
+                </a:lnTo>
+                <a:lnTo>
+                  <a:pt x="875973" y="2762283"/>
+                </a:lnTo>
+                <a:lnTo>
+                  <a:pt x="943489" y="2768356"/>
+                </a:lnTo>
+                <a:lnTo>
+                  <a:pt x="1011051" y="2764838"/>
+                </a:lnTo>
+                <a:lnTo>
+                  <a:pt x="1078318" y="2751748"/>
+                </a:lnTo>
+                <a:lnTo>
+                  <a:pt x="1144951" y="2729151"/>
+                </a:lnTo>
+                <a:lnTo>
+                  <a:pt x="1210616" y="2697161"/>
+                </a:lnTo>
+                <a:lnTo>
+                  <a:pt x="1274981" y="2655939"/>
+                </a:lnTo>
+                <a:lnTo>
+                  <a:pt x="1337722" y="2605692"/>
+                </a:lnTo>
+                <a:lnTo>
+                  <a:pt x="1398524" y="2546674"/>
+                </a:lnTo>
+                <a:lnTo>
+                  <a:pt x="1457081" y="2479181"/>
+                </a:lnTo>
+                <a:lnTo>
+                  <a:pt x="1513097" y="2403554"/>
+                </a:lnTo>
+                <a:lnTo>
+                  <a:pt x="1566291" y="2320172"/>
+                </a:lnTo>
+                <a:lnTo>
+                  <a:pt x="1616394" y="2229457"/>
+                </a:lnTo>
+                <a:lnTo>
+                  <a:pt x="1663155" y="2131865"/>
+                </a:lnTo>
+                <a:lnTo>
+                  <a:pt x="1706338" y="2027886"/>
+                </a:lnTo>
+                <a:lnTo>
+                  <a:pt x="1745726" y="1918045"/>
+                </a:lnTo>
+                <a:lnTo>
+                  <a:pt x="1781121" y="1802894"/>
+                </a:lnTo>
+                <a:lnTo>
+                  <a:pt x="1812343" y="1683014"/>
+                </a:lnTo>
+                <a:lnTo>
+                  <a:pt x="1839237" y="1559007"/>
+                </a:lnTo>
+                <a:lnTo>
+                  <a:pt x="1861666" y="1431499"/>
+                </a:lnTo>
+                <a:lnTo>
+                  <a:pt x="1879518" y="1301130"/>
+                </a:lnTo>
+                <a:lnTo>
+                  <a:pt x="1892703" y="1168558"/>
+                </a:lnTo>
+                <a:lnTo>
+                  <a:pt x="1901154" y="1034450"/>
+                </a:lnTo>
+                <a:lnTo>
+                  <a:pt x="1904829" y="899481"/>
+                </a:lnTo>
+                <a:lnTo>
+                  <a:pt x="1903710" y="764330"/>
+                </a:lnTo>
+                <a:lnTo>
+                  <a:pt x="1897801" y="629678"/>
+                </a:lnTo>
+                <a:lnTo>
+                  <a:pt x="1887133" y="496204"/>
+                </a:lnTo>
+                <a:lnTo>
+                  <a:pt x="1871760" y="364578"/>
+                </a:lnTo>
+                <a:lnTo>
+                  <a:pt x="1851759" y="235463"/>
+                </a:lnTo>
+                <a:lnTo>
+                  <a:pt x="1851759" y="235463"/>
+                </a:lnTo>
+                <a:lnTo>
+                  <a:pt x="1844175" y="203234"/>
+                </a:lnTo>
+                <a:lnTo>
+                  <a:pt x="1832897" y="172105"/>
+                </a:lnTo>
+                <a:lnTo>
+                  <a:pt x="1818077" y="142497"/>
+                </a:lnTo>
+                <a:lnTo>
+                  <a:pt x="1799917" y="114813"/>
+                </a:lnTo>
+                <a:lnTo>
+                  <a:pt x="1778661" y="89427"/>
+                </a:lnTo>
+                <a:lnTo>
+                  <a:pt x="1754599" y="66684"/>
+                </a:lnTo>
+                <a:lnTo>
+                  <a:pt x="1728056" y="46892"/>
+                </a:lnTo>
+                <a:lnTo>
+                  <a:pt x="1699393" y="30319"/>
+                </a:lnTo>
+                <a:lnTo>
+                  <a:pt x="1668998" y="17190"/>
+                </a:lnTo>
+                <a:lnTo>
+                  <a:pt x="1637283" y="7683"/>
+                </a:lnTo>
+                <a:lnTo>
+                  <a:pt x="1604678" y="1927"/>
+                </a:lnTo>
+                <a:lnTo>
+                  <a:pt x="1571625" y="0"/>
+                </a:lnTo>
+                <a:lnTo>
+                  <a:pt x="1538571" y="1927"/>
+                </a:lnTo>
+                <a:lnTo>
+                  <a:pt x="1505966" y="7683"/>
+                </a:lnTo>
+                <a:lnTo>
+                  <a:pt x="1474251" y="17190"/>
+                </a:lnTo>
+                <a:lnTo>
+                  <a:pt x="1443856" y="30319"/>
+                </a:lnTo>
+                <a:lnTo>
+                  <a:pt x="1415193" y="46892"/>
+                </a:lnTo>
+                <a:lnTo>
+                  <a:pt x="1388650" y="66684"/>
+                </a:lnTo>
+                <a:lnTo>
+                  <a:pt x="1364588" y="89427"/>
+                </a:lnTo>
+                <a:lnTo>
+                  <a:pt x="1343332" y="114813"/>
+                </a:lnTo>
+                <a:lnTo>
+                  <a:pt x="1325172" y="142497"/>
+                </a:lnTo>
+                <a:lnTo>
+                  <a:pt x="1310352" y="172105"/>
+                </a:lnTo>
+                <a:lnTo>
+                  <a:pt x="1299074" y="203234"/>
+                </a:lnTo>
+                <a:lnTo>
+                  <a:pt x="1291490" y="235463"/>
+                </a:lnTo>
+                <a:lnTo>
+                  <a:pt x="1291490" y="235463"/>
+                </a:lnTo>
+                <a:lnTo>
+                  <a:pt x="1269800" y="377194"/>
+                </a:lnTo>
+                <a:lnTo>
+                  <a:pt x="1253686" y="521868"/>
+                </a:lnTo>
+                <a:lnTo>
+                  <a:pt x="1243244" y="668609"/>
+                </a:lnTo>
+                <a:lnTo>
+                  <a:pt x="1238538" y="816530"/>
+                </a:lnTo>
+                <a:lnTo>
+                  <a:pt x="1239597" y="964736"/>
+                </a:lnTo>
+                <a:lnTo>
+                  <a:pt x="1246414" y="1112327"/>
+                </a:lnTo>
+                <a:lnTo>
+                  <a:pt x="1258947" y="1258413"/>
+                </a:lnTo>
+                <a:lnTo>
+                  <a:pt x="1277122" y="1402107"/>
+                </a:lnTo>
+                <a:lnTo>
+                  <a:pt x="1300827" y="1542540"/>
+                </a:lnTo>
+                <a:lnTo>
+                  <a:pt x="1329919" y="1678862"/>
+                </a:lnTo>
+                <a:lnTo>
+                  <a:pt x="1364223" y="1810248"/>
+                </a:lnTo>
+                <a:lnTo>
+                  <a:pt x="1403531" y="1935902"/>
+                </a:lnTo>
+                <a:lnTo>
+                  <a:pt x="1447604" y="2055063"/>
+                </a:lnTo>
+                <a:lnTo>
+                  <a:pt x="1496176" y="2167011"/>
+                </a:lnTo>
+                <a:lnTo>
+                  <a:pt x="1548953" y="2271068"/>
+                </a:lnTo>
+                <a:lnTo>
+                  <a:pt x="1605615" y="2366602"/>
+                </a:lnTo>
+                <a:lnTo>
+                  <a:pt x="1665819" y="2453037"/>
+                </a:lnTo>
+                <a:lnTo>
+                  <a:pt x="1729201" y="2529849"/>
+                </a:lnTo>
+                <a:lnTo>
+                  <a:pt x="1795377" y="2596573"/>
+                </a:lnTo>
+                <a:lnTo>
+                  <a:pt x="1863947" y="2652805"/>
+                </a:lnTo>
+                <a:lnTo>
+                  <a:pt x="1934495" y="2698205"/>
+                </a:lnTo>
+                <a:lnTo>
+                  <a:pt x="2006594" y="2732498"/>
+                </a:lnTo>
+                <a:lnTo>
+                  <a:pt x="2079809" y="2755475"/>
+                </a:lnTo>
+                <a:lnTo>
+                  <a:pt x="2153694" y="2766999"/>
+                </a:lnTo>
+                <a:lnTo>
+                  <a:pt x="2227805" y="2766999"/>
+                </a:lnTo>
+                <a:lnTo>
+                  <a:pt x="2301690" y="2755475"/>
+                </a:lnTo>
+                <a:lnTo>
+                  <a:pt x="2374905" y="2732498"/>
+                </a:lnTo>
+                <a:lnTo>
+                  <a:pt x="2447004" y="2698205"/>
+                </a:lnTo>
+                <a:lnTo>
+                  <a:pt x="2517552" y="2652805"/>
+                </a:lnTo>
+                <a:lnTo>
+                  <a:pt x="2586122" y="2596573"/>
+                </a:lnTo>
+                <a:lnTo>
+                  <a:pt x="2652298" y="2529849"/>
+                </a:lnTo>
+                <a:lnTo>
+                  <a:pt x="2715680" y="2453037"/>
+                </a:lnTo>
+                <a:lnTo>
+                  <a:pt x="2775884" y="2366602"/>
+                </a:lnTo>
+                <a:lnTo>
+                  <a:pt x="2832546" y="2271068"/>
+                </a:lnTo>
+                <a:lnTo>
+                  <a:pt x="2885323" y="2167011"/>
+                </a:lnTo>
+                <a:lnTo>
+                  <a:pt x="2933895" y="2055063"/>
+                </a:lnTo>
+                <a:lnTo>
+                  <a:pt x="2977968" y="1935902"/>
+                </a:lnTo>
+                <a:lnTo>
+                  <a:pt x="3017276" y="1810248"/>
+                </a:lnTo>
+                <a:lnTo>
+                  <a:pt x="3051580" y="1678862"/>
+                </a:lnTo>
+                <a:lnTo>
+                  <a:pt x="3080672" y="1542540"/>
+                </a:lnTo>
+                <a:lnTo>
+                  <a:pt x="3104377" y="1402107"/>
+                </a:lnTo>
+                <a:lnTo>
+                  <a:pt x="3122552" y="1258413"/>
+                </a:lnTo>
+                <a:lnTo>
+                  <a:pt x="3135085" y="1112327"/>
+                </a:lnTo>
+                <a:lnTo>
+                  <a:pt x="3141902" y="964736"/>
+                </a:lnTo>
+                <a:lnTo>
+                  <a:pt x="3142961" y="816530"/>
+                </a:lnTo>
+                <a:lnTo>
+                  <a:pt x="3138255" y="668609"/>
+                </a:lnTo>
+                <a:lnTo>
+                  <a:pt x="3127813" y="521868"/>
+                </a:lnTo>
+                <a:lnTo>
+                  <a:pt x="3111699" y="377194"/>
+                </a:lnTo>
+                <a:lnTo>
+                  <a:pt x="3090009" y="235463"/>
+                </a:lnTo>
+                <a:lnTo>
+                  <a:pt x="3090009" y="235463"/>
+                </a:lnTo>
+                <a:lnTo>
+                  <a:pt x="3082425" y="203234"/>
+                </a:lnTo>
+                <a:lnTo>
+                  <a:pt x="3071147" y="172105"/>
+                </a:lnTo>
+                <a:lnTo>
+                  <a:pt x="3056327" y="142497"/>
+                </a:lnTo>
+                <a:lnTo>
+                  <a:pt x="3038167" y="114813"/>
+                </a:lnTo>
+                <a:lnTo>
+                  <a:pt x="3016911" y="89427"/>
+                </a:lnTo>
+                <a:lnTo>
+                  <a:pt x="2992849" y="66684"/>
+                </a:lnTo>
+                <a:lnTo>
+                  <a:pt x="2966306" y="46892"/>
+                </a:lnTo>
+                <a:lnTo>
+                  <a:pt x="2937643" y="30319"/>
+                </a:lnTo>
+                <a:lnTo>
+                  <a:pt x="2907248" y="17190"/>
+                </a:lnTo>
+                <a:lnTo>
+                  <a:pt x="2875533" y="7683"/>
+                </a:lnTo>
+                <a:lnTo>
+                  <a:pt x="2842928" y="1927"/>
+                </a:lnTo>
+                <a:lnTo>
+                  <a:pt x="2809875" y="0"/>
+                </a:lnTo>
+                <a:lnTo>
+                  <a:pt x="2776821" y="1927"/>
+                </a:lnTo>
+                <a:lnTo>
+                  <a:pt x="2744216" y="7683"/>
+                </a:lnTo>
+                <a:lnTo>
+                  <a:pt x="2712501" y="17190"/>
+                </a:lnTo>
+                <a:lnTo>
+                  <a:pt x="2682106" y="30319"/>
+                </a:lnTo>
+                <a:lnTo>
+                  <a:pt x="2653443" y="46892"/>
+                </a:lnTo>
+                <a:lnTo>
+                  <a:pt x="2626900" y="66684"/>
+                </a:lnTo>
+                <a:lnTo>
+                  <a:pt x="2602838" y="89427"/>
+                </a:lnTo>
+                <a:lnTo>
+                  <a:pt x="2581582" y="114813"/>
+                </a:lnTo>
+                <a:lnTo>
+                  <a:pt x="2563422" y="142497"/>
+                </a:lnTo>
+                <a:lnTo>
+                  <a:pt x="2548602" y="172105"/>
+                </a:lnTo>
+                <a:lnTo>
+                  <a:pt x="2537324" y="203234"/>
+                </a:lnTo>
+                <a:lnTo>
+                  <a:pt x="2529740" y="235463"/>
+                </a:lnTo>
+                <a:lnTo>
+                  <a:pt x="2529740" y="235463"/>
+                </a:lnTo>
+                <a:lnTo>
+                  <a:pt x="2508050" y="377194"/>
+                </a:lnTo>
+                <a:lnTo>
+                  <a:pt x="2491936" y="521868"/>
+                </a:lnTo>
+                <a:lnTo>
+                  <a:pt x="2481494" y="668609"/>
+                </a:lnTo>
+                <a:lnTo>
+                  <a:pt x="2476788" y="816530"/>
+                </a:lnTo>
+                <a:lnTo>
+                  <a:pt x="2477847" y="964736"/>
+                </a:lnTo>
+                <a:lnTo>
+                  <a:pt x="2484664" y="1112327"/>
+                </a:lnTo>
+                <a:lnTo>
+                  <a:pt x="2497197" y="1258413"/>
+                </a:lnTo>
+                <a:lnTo>
+                  <a:pt x="2515372" y="1402107"/>
+                </a:lnTo>
+                <a:lnTo>
+                  <a:pt x="2539077" y="1542540"/>
+                </a:lnTo>
+                <a:lnTo>
+                  <a:pt x="2568169" y="1678862"/>
+                </a:lnTo>
+                <a:lnTo>
+                  <a:pt x="2602473" y="1810248"/>
+                </a:lnTo>
+                <a:lnTo>
+                  <a:pt x="2641781" y="1935902"/>
+                </a:lnTo>
+                <a:lnTo>
+                  <a:pt x="2685854" y="2055063"/>
+                </a:lnTo>
+                <a:lnTo>
+                  <a:pt x="2734426" y="2167011"/>
+                </a:lnTo>
+                <a:lnTo>
+                  <a:pt x="2787203" y="2271068"/>
+                </a:lnTo>
+                <a:lnTo>
+                  <a:pt x="2843865" y="2366602"/>
+                </a:lnTo>
+                <a:lnTo>
+                  <a:pt x="2904069" y="2453037"/>
+                </a:lnTo>
+                <a:lnTo>
+                  <a:pt x="2967451" y="2529849"/>
+                </a:lnTo>
+                <a:lnTo>
+                  <a:pt x="3033627" y="2596573"/>
+                </a:lnTo>
+                <a:lnTo>
+                  <a:pt x="3102197" y="2652805"/>
+                </a:lnTo>
+                <a:lnTo>
+                  <a:pt x="3172745" y="2698205"/>
+                </a:lnTo>
+                <a:lnTo>
+                  <a:pt x="3244844" y="2732498"/>
+                </a:lnTo>
+                <a:lnTo>
+                  <a:pt x="3318059" y="2755475"/>
+                </a:lnTo>
+                <a:lnTo>
+                  <a:pt x="3391944" y="2766999"/>
+                </a:lnTo>
+                <a:lnTo>
+                  <a:pt x="3466055" y="2766999"/>
+                </a:lnTo>
+                <a:lnTo>
+                  <a:pt x="3539940" y="2755475"/>
+                </a:lnTo>
+                <a:lnTo>
+                  <a:pt x="3613155" y="2732498"/>
+                </a:lnTo>
+                <a:lnTo>
+                  <a:pt x="3685254" y="2698205"/>
+                </a:lnTo>
+                <a:lnTo>
+                  <a:pt x="3755802" y="2652805"/>
+                </a:lnTo>
+                <a:lnTo>
+                  <a:pt x="3824372" y="2596573"/>
+                </a:lnTo>
+                <a:lnTo>
+                  <a:pt x="3890548" y="2529849"/>
+                </a:lnTo>
+                <a:lnTo>
+                  <a:pt x="3953930" y="2453037"/>
+                </a:lnTo>
+                <a:lnTo>
+                  <a:pt x="4014134" y="2366602"/>
+                </a:lnTo>
+                <a:lnTo>
+                  <a:pt x="4070796" y="2271068"/>
+                </a:lnTo>
+                <a:lnTo>
+                  <a:pt x="4123573" y="2167011"/>
+                </a:lnTo>
+                <a:lnTo>
+                  <a:pt x="4172145" y="2055063"/>
+                </a:lnTo>
+                <a:lnTo>
+                  <a:pt x="4216218" y="1935902"/>
+                </a:lnTo>
+                <a:lnTo>
+                  <a:pt x="4255526" y="1810248"/>
+                </a:lnTo>
+                <a:lnTo>
+                  <a:pt x="4289830" y="1678862"/>
+                </a:lnTo>
+                <a:lnTo>
+                  <a:pt x="4318922" y="1542540"/>
+                </a:lnTo>
+                <a:lnTo>
+                  <a:pt x="4342627" y="1402107"/>
+                </a:lnTo>
+                <a:lnTo>
+                  <a:pt x="4360802" y="1258413"/>
+                </a:lnTo>
+                <a:lnTo>
+                  <a:pt x="4373335" y="1112327"/>
+                </a:lnTo>
+                <a:lnTo>
+                  <a:pt x="4380152" y="964736"/>
+                </a:lnTo>
+                <a:lnTo>
+                  <a:pt x="4381211" y="816530"/>
+                </a:lnTo>
+                <a:lnTo>
+                  <a:pt x="4376505" y="668609"/>
+                </a:lnTo>
+                <a:lnTo>
+                  <a:pt x="4366063" y="521868"/>
+                </a:lnTo>
+                <a:lnTo>
+                  <a:pt x="4349949" y="377194"/>
+                </a:lnTo>
+                <a:lnTo>
+                  <a:pt x="4328259" y="235463"/>
+                </a:lnTo>
+                <a:lnTo>
+                  <a:pt x="4328259" y="235463"/>
+                </a:lnTo>
+                <a:lnTo>
+                  <a:pt x="4320675" y="203234"/>
+                </a:lnTo>
+                <a:lnTo>
+                  <a:pt x="4309397" y="172105"/>
+                </a:lnTo>
+                <a:lnTo>
+                  <a:pt x="4294577" y="142497"/>
+                </a:lnTo>
+                <a:lnTo>
+                  <a:pt x="4276417" y="114813"/>
+                </a:lnTo>
+                <a:lnTo>
+                  <a:pt x="4255161" y="89427"/>
+                </a:lnTo>
+                <a:lnTo>
+                  <a:pt x="4231099" y="66684"/>
+                </a:lnTo>
+                <a:lnTo>
+                  <a:pt x="4204556" y="46892"/>
+                </a:lnTo>
+                <a:lnTo>
+                  <a:pt x="4175893" y="30319"/>
+                </a:lnTo>
+                <a:lnTo>
+                  <a:pt x="4145498" y="17190"/>
+                </a:lnTo>
+                <a:lnTo>
+                  <a:pt x="4113783" y="7683"/>
+                </a:lnTo>
+                <a:lnTo>
+                  <a:pt x="4081178" y="1927"/>
+                </a:lnTo>
+                <a:lnTo>
+                  <a:pt x="4048125" y="0"/>
+                </a:lnTo>
+                <a:lnTo>
+                  <a:pt x="4015071" y="1927"/>
+                </a:lnTo>
+                <a:lnTo>
+                  <a:pt x="3982466" y="7683"/>
+                </a:lnTo>
+                <a:lnTo>
+                  <a:pt x="3950751" y="17190"/>
+                </a:lnTo>
+                <a:lnTo>
+                  <a:pt x="3920356" y="30319"/>
+                </a:lnTo>
+                <a:lnTo>
+                  <a:pt x="3891693" y="46892"/>
+                </a:lnTo>
+                <a:lnTo>
+                  <a:pt x="3865150" y="66684"/>
+                </a:lnTo>
+                <a:lnTo>
+                  <a:pt x="3841088" y="89427"/>
+                </a:lnTo>
+                <a:lnTo>
+                  <a:pt x="3819832" y="114813"/>
+                </a:lnTo>
+                <a:lnTo>
+                  <a:pt x="3801672" y="142497"/>
+                </a:lnTo>
+                <a:lnTo>
+                  <a:pt x="3786852" y="172105"/>
+                </a:lnTo>
+                <a:lnTo>
+                  <a:pt x="3775574" y="203234"/>
+                </a:lnTo>
+                <a:lnTo>
+                  <a:pt x="3767990" y="235463"/>
+                </a:lnTo>
+                <a:lnTo>
+                  <a:pt x="3767990" y="235463"/>
+                </a:lnTo>
+                <a:lnTo>
+                  <a:pt x="3746300" y="377194"/>
+                </a:lnTo>
+                <a:lnTo>
+                  <a:pt x="3730186" y="521868"/>
+                </a:lnTo>
+                <a:lnTo>
+                  <a:pt x="3719744" y="668609"/>
+                </a:lnTo>
+                <a:lnTo>
+                  <a:pt x="3715038" y="816530"/>
+                </a:lnTo>
+                <a:lnTo>
+                  <a:pt x="3716097" y="964736"/>
+                </a:lnTo>
+                <a:lnTo>
+                  <a:pt x="3722914" y="1112327"/>
+                </a:lnTo>
+                <a:lnTo>
+                  <a:pt x="3735447" y="1258413"/>
+                </a:lnTo>
+                <a:lnTo>
+                  <a:pt x="3753622" y="1402107"/>
+                </a:lnTo>
+                <a:lnTo>
+                  <a:pt x="3777327" y="1542540"/>
+                </a:lnTo>
+                <a:lnTo>
+                  <a:pt x="3806419" y="1678862"/>
+                </a:lnTo>
+                <a:lnTo>
+                  <a:pt x="3840723" y="1810248"/>
+                </a:lnTo>
+                <a:lnTo>
+                  <a:pt x="3880031" y="1935902"/>
+                </a:lnTo>
+                <a:lnTo>
+                  <a:pt x="3924104" y="2055063"/>
+                </a:lnTo>
+                <a:lnTo>
+                  <a:pt x="3972676" y="2167011"/>
+                </a:lnTo>
+                <a:lnTo>
+                  <a:pt x="4025453" y="2271068"/>
+                </a:lnTo>
+                <a:lnTo>
+                  <a:pt x="4082115" y="2366602"/>
+                </a:lnTo>
+                <a:lnTo>
+                  <a:pt x="4142319" y="2453037"/>
+                </a:lnTo>
+                <a:lnTo>
+                  <a:pt x="4205701" y="2529849"/>
+                </a:lnTo>
+                <a:lnTo>
+                  <a:pt x="4271877" y="2596573"/>
+                </a:lnTo>
+                <a:lnTo>
+                  <a:pt x="4340447" y="2652805"/>
+                </a:lnTo>
+                <a:lnTo>
+                  <a:pt x="4410995" y="2698205"/>
+                </a:lnTo>
+                <a:lnTo>
+                  <a:pt x="4483094" y="2732498"/>
+                </a:lnTo>
+                <a:lnTo>
+                  <a:pt x="4556309" y="2755475"/>
+                </a:lnTo>
+                <a:lnTo>
+                  <a:pt x="4630194" y="2766999"/>
+                </a:lnTo>
+                <a:lnTo>
+                  <a:pt x="4704305" y="2766999"/>
+                </a:lnTo>
+                <a:lnTo>
+                  <a:pt x="4778190" y="2755475"/>
+                </a:lnTo>
+                <a:lnTo>
+                  <a:pt x="4851405" y="2732498"/>
+                </a:lnTo>
+                <a:lnTo>
+                  <a:pt x="4923504" y="2698205"/>
+                </a:lnTo>
+                <a:lnTo>
+                  <a:pt x="4994052" y="2652805"/>
+                </a:lnTo>
+                <a:lnTo>
+                  <a:pt x="5062622" y="2596573"/>
+                </a:lnTo>
+                <a:lnTo>
+                  <a:pt x="5128798" y="2529849"/>
+                </a:lnTo>
+                <a:lnTo>
+                  <a:pt x="5192180" y="2453037"/>
+                </a:lnTo>
+                <a:lnTo>
+                  <a:pt x="5252384" y="2366602"/>
+                </a:lnTo>
+                <a:lnTo>
+                  <a:pt x="5309046" y="2271068"/>
+                </a:lnTo>
+                <a:lnTo>
+                  <a:pt x="5361823" y="2167011"/>
+                </a:lnTo>
+                <a:lnTo>
+                  <a:pt x="5410395" y="2055063"/>
+                </a:lnTo>
+                <a:lnTo>
+                  <a:pt x="5454468" y="1935902"/>
+                </a:lnTo>
+                <a:lnTo>
+                  <a:pt x="5493776" y="1810248"/>
+                </a:lnTo>
+                <a:lnTo>
+                  <a:pt x="5528080" y="1678862"/>
+                </a:lnTo>
+                <a:lnTo>
+                  <a:pt x="5557172" y="1542540"/>
+                </a:lnTo>
+                <a:lnTo>
+                  <a:pt x="5580877" y="1402107"/>
+                </a:lnTo>
+                <a:lnTo>
+                  <a:pt x="5599052" y="1258413"/>
+                </a:lnTo>
+                <a:lnTo>
+                  <a:pt x="5611585" y="1112327"/>
+                </a:lnTo>
+                <a:lnTo>
+                  <a:pt x="5618402" y="964736"/>
+                </a:lnTo>
+                <a:lnTo>
+                  <a:pt x="5619461" y="816530"/>
+                </a:lnTo>
+                <a:lnTo>
+                  <a:pt x="5614755" y="668609"/>
+                </a:lnTo>
+                <a:lnTo>
+                  <a:pt x="5604313" y="521868"/>
+                </a:lnTo>
+                <a:lnTo>
+                  <a:pt x="5588199" y="377194"/>
+                </a:lnTo>
+                <a:lnTo>
+                  <a:pt x="5566509" y="235463"/>
+                </a:lnTo>
+                <a:lnTo>
+                  <a:pt x="5566509" y="235463"/>
+                </a:lnTo>
+                <a:lnTo>
+                  <a:pt x="5558925" y="203234"/>
+                </a:lnTo>
+                <a:lnTo>
+                  <a:pt x="5547647" y="172105"/>
+                </a:lnTo>
+                <a:lnTo>
+                  <a:pt x="5532827" y="142497"/>
+                </a:lnTo>
+                <a:lnTo>
+                  <a:pt x="5514667" y="114813"/>
+                </a:lnTo>
+                <a:lnTo>
+                  <a:pt x="5493411" y="89427"/>
+                </a:lnTo>
+                <a:lnTo>
+                  <a:pt x="5469349" y="66684"/>
+                </a:lnTo>
+                <a:lnTo>
+                  <a:pt x="5442806" y="46892"/>
+                </a:lnTo>
+                <a:lnTo>
+                  <a:pt x="5414143" y="30319"/>
+                </a:lnTo>
+                <a:lnTo>
+                  <a:pt x="5383748" y="17190"/>
+                </a:lnTo>
+                <a:lnTo>
+                  <a:pt x="5352033" y="7683"/>
+                </a:lnTo>
+                <a:lnTo>
+                  <a:pt x="5319428" y="1927"/>
+                </a:lnTo>
+                <a:lnTo>
+                  <a:pt x="5286375" y="0"/>
+                </a:lnTo>
+                <a:lnTo>
+                  <a:pt x="5253321" y="1927"/>
+                </a:lnTo>
+                <a:lnTo>
+                  <a:pt x="5220716" y="7683"/>
+                </a:lnTo>
+                <a:lnTo>
+                  <a:pt x="5189001" y="17190"/>
+                </a:lnTo>
+                <a:lnTo>
+                  <a:pt x="5158606" y="30319"/>
+                </a:lnTo>
+                <a:lnTo>
+                  <a:pt x="5129943" y="46892"/>
+                </a:lnTo>
+                <a:lnTo>
+                  <a:pt x="5103400" y="66684"/>
+                </a:lnTo>
+                <a:lnTo>
+                  <a:pt x="5079338" y="89427"/>
+                </a:lnTo>
+                <a:lnTo>
+                  <a:pt x="5058082" y="114813"/>
+                </a:lnTo>
+                <a:lnTo>
+                  <a:pt x="5039922" y="142497"/>
+                </a:lnTo>
+                <a:lnTo>
+                  <a:pt x="5025102" y="172105"/>
+                </a:lnTo>
+                <a:lnTo>
+                  <a:pt x="5013824" y="203234"/>
+                </a:lnTo>
+                <a:lnTo>
+                  <a:pt x="5006240" y="235463"/>
+                </a:lnTo>
+                <a:lnTo>
+                  <a:pt x="5006240" y="235463"/>
+                </a:lnTo>
+                <a:lnTo>
+                  <a:pt x="4986239" y="364578"/>
+                </a:lnTo>
+                <a:lnTo>
+                  <a:pt x="4970866" y="496204"/>
+                </a:lnTo>
+                <a:lnTo>
+                  <a:pt x="4960198" y="629678"/>
+                </a:lnTo>
+                <a:lnTo>
+                  <a:pt x="4954289" y="764330"/>
+                </a:lnTo>
+                <a:lnTo>
+                  <a:pt x="4953170" y="899481"/>
+                </a:lnTo>
+                <a:lnTo>
+                  <a:pt x="4956845" y="1034450"/>
+                </a:lnTo>
+                <a:lnTo>
+                  <a:pt x="4965296" y="1168558"/>
+                </a:lnTo>
+                <a:lnTo>
+                  <a:pt x="4978481" y="1301130"/>
+                </a:lnTo>
+                <a:lnTo>
+                  <a:pt x="4996333" y="1431499"/>
+                </a:lnTo>
+                <a:lnTo>
+                  <a:pt x="5018762" y="1559007"/>
+                </a:lnTo>
+                <a:lnTo>
+                  <a:pt x="5045656" y="1683014"/>
+                </a:lnTo>
+                <a:lnTo>
+                  <a:pt x="5076878" y="1802894"/>
+                </a:lnTo>
+                <a:lnTo>
+                  <a:pt x="5112273" y="1918045"/>
+                </a:lnTo>
+                <a:lnTo>
+                  <a:pt x="5151661" y="2027886"/>
+                </a:lnTo>
+                <a:lnTo>
+                  <a:pt x="5194844" y="2131865"/>
+                </a:lnTo>
+                <a:lnTo>
+                  <a:pt x="5241605" y="2229457"/>
+                </a:lnTo>
+                <a:lnTo>
+                  <a:pt x="5291708" y="2320172"/>
+                </a:lnTo>
+                <a:lnTo>
+                  <a:pt x="5344902" y="2403554"/>
+                </a:lnTo>
+                <a:lnTo>
+                  <a:pt x="5400918" y="2479181"/>
+                </a:lnTo>
+                <a:lnTo>
+                  <a:pt x="5459475" y="2546674"/>
+                </a:lnTo>
+                <a:lnTo>
+                  <a:pt x="5520277" y="2605692"/>
+                </a:lnTo>
+                <a:lnTo>
+                  <a:pt x="5583018" y="2655939"/>
+                </a:lnTo>
+                <a:lnTo>
+                  <a:pt x="5647383" y="2697161"/>
+                </a:lnTo>
+                <a:lnTo>
+                  <a:pt x="5713048" y="2729151"/>
+                </a:lnTo>
+                <a:lnTo>
+                  <a:pt x="5779681" y="2751748"/>
+                </a:lnTo>
+                <a:lnTo>
+                  <a:pt x="5846948" y="2764838"/>
+                </a:lnTo>
+                <a:lnTo>
+                  <a:pt x="5914510" y="2768356"/>
+                </a:lnTo>
+                <a:lnTo>
+                  <a:pt x="5982026" y="2762283"/>
+                </a:lnTo>
+                <a:lnTo>
+                  <a:pt x="6049157" y="2746650"/>
+                </a:lnTo>
+                <a:lnTo>
+                  <a:pt x="6115565" y="2721535"/>
+                </a:lnTo>
+                <a:lnTo>
+                  <a:pt x="6180915" y="2687066"/>
+                </a:lnTo>
+                <a:lnTo>
+                  <a:pt x="6244879" y="2643416"/>
+                </a:lnTo>
+                <a:lnTo>
+                  <a:pt x="6307134" y="2590804"/>
+                </a:lnTo>
+                <a:lnTo>
+                  <a:pt x="6367367" y="2529496"/>
+                </a:lnTo>
+                <a:lnTo>
+                  <a:pt x="6425274" y="2459800"/>
+                </a:lnTo>
+                <a:lnTo>
+                  <a:pt x="6480565" y="2382067"/>
+                </a:lnTo>
+                <a:lnTo>
+                  <a:pt x="6532960" y="2296688"/>
+                </a:lnTo>
+                <a:lnTo>
+                  <a:pt x="6582197" y="2204093"/>
+                </a:lnTo>
+                <a:lnTo>
+                  <a:pt x="6628026" y="2104749"/>
+                </a:lnTo>
+                <a:lnTo>
+                  <a:pt x="6670218" y="1999155"/>
+                </a:lnTo>
+                <a:lnTo>
+                  <a:pt x="6708560" y="1887843"/>
+                </a:lnTo>
+                <a:lnTo>
+                  <a:pt x="6742859" y="1771374"/>
+                </a:lnTo>
+                <a:lnTo>
+                  <a:pt x="6772942" y="1650333"/>
+                </a:lnTo>
+                <a:lnTo>
+                  <a:pt x="6798658" y="1525331"/>
+                </a:lnTo>
+                <a:lnTo>
+                  <a:pt x="6819877" y="1396997"/>
+                </a:lnTo>
+                <a:lnTo>
+                  <a:pt x="6836492" y="1265976"/>
+                </a:lnTo>
+                <a:lnTo>
+                  <a:pt x="6848421" y="1132929"/>
+                </a:lnTo>
+                <a:lnTo>
+                  <a:pt x="6855602" y="998525"/>
+                </a:lnTo>
+                <a:lnTo>
+                  <a:pt x="6858000" y="863441"/>
                 </a:lnTo>
               </a:path>
             </a:pathLst>
           </a:custGeom>
           <a:noFill/>
-          <a:ln w="4572">
+          <a:ln w="9144">
             <a:solidFill>
               <a:srgbClr val="0000FF"/>
             </a:solidFill>
